--- a/slides/mapreduce/mapreduce_by_Mahmoud_Parsian/02_understanding_parallelism_birthday_party.pptx
+++ b/slides/mapreduce/mapreduce_by_Mahmoud_Parsian/02_understanding_parallelism_birthday_party.pptx
@@ -3384,7 +3384,7 @@
             </a:br>
             <a:r>
               <a:rPr lang="en-US" dirty="0"/>
-              <a:t>Parallelism &amp;</a:t>
+              <a:t>Parallelism &amp; </a:t>
             </a:r>
             <a:br>
               <a:rPr lang="en-US" dirty="0"/>
@@ -3398,7 +3398,7 @@
             </a:br>
             <a:r>
               <a:rPr lang="en-US" sz="2700" dirty="0"/>
-              <a:t>(informal introduction)</a:t>
+              <a:t> (informal introduction)</a:t>
             </a:r>
             <a:endParaRPr lang="en-US" dirty="0"/>
           </a:p>
@@ -3561,7 +3561,7 @@
             </a:r>
             <a:r>
               <a:rPr lang="en-US" sz="2800" b="1" dirty="0"/>
-              <a:t>234 minutes </a:t>
+              <a:t>233 minutes </a:t>
             </a:r>
             <a:r>
               <a:rPr lang="en-US" sz="2800" dirty="0"/>
@@ -3620,7 +3620,7 @@
                 <a:latin typeface="Consolas" panose="020B0609020204030204" pitchFamily="49" charset="0"/>
                 <a:cs typeface="Consolas" panose="020B0609020204030204" pitchFamily="49" charset="0"/>
               </a:rPr>
-              <a:t>100 x 14 = 1400 seconds = 24 minutes</a:t>
+              <a:t>100 x 14 = 1400 seconds = 23 minutes</a:t>
             </a:r>
           </a:p>
           <a:p>
@@ -3642,7 +3642,7 @@
                   <a:srgbClr val="002060"/>
                 </a:solidFill>
               </a:rPr>
-              <a:t>234 minutes </a:t>
+              <a:t>233 minutes </a:t>
             </a:r>
             <a:r>
               <a:rPr lang="en-US" sz="2800" dirty="0">
@@ -3658,7 +3658,7 @@
                   <a:srgbClr val="002060"/>
                 </a:solidFill>
               </a:rPr>
-              <a:t>24 minutes</a:t>
+              <a:t>23 minutes</a:t>
             </a:r>
           </a:p>
           <a:p>
@@ -3756,7 +3756,7 @@
           <a:p>
             <a:r>
               <a:rPr lang="en-US" dirty="0"/>
-              <a:t>Processing Data? 10 parallel executors</a:t>
+              <a:t>Processing Data? 10 parallel executors. </a:t>
             </a:r>
             <a:br>
               <a:rPr lang="en-US" dirty="0"/>
@@ -4949,7 +4949,7 @@
                   <a:srgbClr val="0070C0"/>
                 </a:solidFill>
               </a:rPr>
-              <a:t>and can not spend 24 minutes for shopping.</a:t>
+              <a:t>and can not spend 23 minutes for shopping.</a:t>
             </a:r>
           </a:p>
           <a:p>
@@ -4977,7 +4977,7 @@
             <a:pPr algn="l"/>
             <a:r>
               <a:rPr lang="en-US" sz="2800" dirty="0"/>
-              <a:t>      they will do shopping and deliver to Alex.</a:t>
+              <a:t>they will do shopping and deliver to Alex.</a:t>
             </a:r>
           </a:p>
           <a:p>
@@ -5015,7 +5015,7 @@
                 <a:latin typeface="Consolas" panose="020B0609020204030204" pitchFamily="49" charset="0"/>
                 <a:cs typeface="Consolas" panose="020B0609020204030204" pitchFamily="49" charset="0"/>
               </a:rPr>
-              <a:t>10 x 14 = 140 seconds = about 3 minutes</a:t>
+              <a:t>10 x 14 = 140 seconds = about 2 minutes</a:t>
             </a:r>
           </a:p>
           <a:p>
@@ -5037,7 +5037,7 @@
                   <a:srgbClr val="002060"/>
                 </a:solidFill>
               </a:rPr>
-              <a:t>234 minutes </a:t>
+              <a:t>233 minutes </a:t>
             </a:r>
             <a:r>
               <a:rPr lang="en-US" sz="2800" dirty="0">
@@ -5053,7 +5053,7 @@
                   <a:srgbClr val="002060"/>
                 </a:solidFill>
               </a:rPr>
-              <a:t>3 minutes</a:t>
+              <a:t>2 minutes</a:t>
             </a:r>
           </a:p>
           <a:p>
@@ -5151,7 +5151,7 @@
           <a:p>
             <a:r>
               <a:rPr lang="en-US" dirty="0"/>
-              <a:t>Processing Data? 100 parallel executors</a:t>
+              <a:t>Processing Data? 100 parallel executors. </a:t>
             </a:r>
             <a:br>
               <a:rPr lang="en-US" dirty="0"/>
@@ -6344,7 +6344,7 @@
                   <a:srgbClr val="0070C0"/>
                 </a:solidFill>
               </a:rPr>
-              <a:t>and can not even spend 3 minutes for shopping.</a:t>
+              <a:t>and can not even spend 2 minutes for shopping.</a:t>
             </a:r>
           </a:p>
           <a:p>
@@ -6449,7 +6449,7 @@
                 <a:latin typeface="Consolas" panose="020B0609020204030204" pitchFamily="49" charset="0"/>
                 <a:cs typeface="Consolas" panose="020B0609020204030204" pitchFamily="49" charset="0"/>
               </a:rPr>
-              <a:t>234 minutes </a:t>
+              <a:t>233 minutes </a:t>
             </a:r>
             <a:r>
               <a:rPr lang="en-US" sz="2400" dirty="0">
@@ -6561,7 +6561,7 @@
           <a:p>
             <a:r>
               <a:rPr lang="en-US" dirty="0"/>
-              <a:t>Processing Data? 1000 parallel executors</a:t>
+              <a:t>Processing Data? 1000 parallel executors. </a:t>
             </a:r>
             <a:br>
               <a:rPr lang="en-US" dirty="0"/>
@@ -7251,7 +7251,7 @@
               <a:rPr lang="en-US" dirty="0">
                 <a:latin typeface="Arial" charset="0"/>
               </a:rPr>
-              <a:t>Partition various tasks carried out solving the problem among the cores.</a:t>
+              <a:t>Partition the various tasks involved in solving the problem among the cores.</a:t>
             </a:r>
             <a:br>
               <a:rPr lang="en-US" dirty="0">
@@ -7288,19 +7288,19 @@
               <a:rPr lang="en-US" dirty="0">
                 <a:latin typeface="Arial" charset="0"/>
               </a:rPr>
-              <a:t>Each core carries out similar operations on it</a:t>
+              <a:t>Each core carries out similar operations on its</a:t>
             </a:r>
             <a:r>
               <a:rPr lang="ja-JP" altLang="en-US">
                 <a:latin typeface="Arial" charset="0"/>
               </a:rPr>
-              <a:t>’</a:t>
+              <a:t/>
             </a:r>
             <a:r>
               <a:rPr lang="en-US" dirty="0">
                 <a:latin typeface="Arial" charset="0"/>
               </a:rPr>
-              <a:t>s part of the data.</a:t>
+              <a:t> part of the data.</a:t>
             </a:r>
           </a:p>
         </p:txBody>
@@ -7418,7 +7418,7 @@
               <a:rPr lang="en-US" dirty="0">
                 <a:latin typeface="Arial" charset="0"/>
               </a:rPr>
-              <a:t>Let your data has 200,000,000,000 data points</a:t>
+              <a:t>Suppose your data has 200,000,000,000 data points</a:t>
             </a:r>
           </a:p>
           <a:p>
@@ -7468,7 +7468,7 @@
                 </a:solidFill>
                 <a:latin typeface="Arial" charset="0"/>
               </a:rPr>
-              <a:t>2000,000</a:t>
+              <a:t>2,000,000</a:t>
             </a:r>
           </a:p>
           <a:p>
@@ -7480,7 +7480,7 @@
                 </a:solidFill>
                 <a:latin typeface="Arial" charset="0"/>
               </a:rPr>
-              <a:t>100,000 x 2000,000 = </a:t>
+              <a:t>100,000 x 2,000,000 = </a:t>
             </a:r>
             <a:r>
               <a:rPr lang="en-US" dirty="0">
@@ -7523,7 +7523,7 @@
               <a:rPr lang="en-US" dirty="0">
                 <a:latin typeface="Arial" charset="0"/>
               </a:rPr>
-              <a:t>With these partitioning in place, The fastest way  to execute </a:t>
+              <a:t>With this partitioning in place, the fastest way to execute </a:t>
             </a:r>
             <a:r>
               <a:rPr lang="en-US" dirty="0">
@@ -7532,7 +7532,7 @@
                 </a:solidFill>
                 <a:latin typeface="Arial" charset="0"/>
               </a:rPr>
-              <a:t>map(function)  </a:t>
+              <a:t>map(function) </a:t>
             </a:r>
             <a:r>
               <a:rPr lang="en-US" dirty="0">
@@ -7755,7 +7755,7 @@
                 </a:solidFill>
                 <a:latin typeface="Arial" charset="0"/>
               </a:rPr>
-              <a:t>At most 1000 mappers are executing at a single point of time.</a:t>
+              <a:t>At most 1000 mappers are executing at any single point in time.</a:t>
             </a:r>
           </a:p>
           <a:p>
@@ -7766,7 +7766,7 @@
                 </a:solidFill>
                 <a:latin typeface="Arial" charset="0"/>
               </a:rPr>
-              <a:t>The more mappers we have: </a:t>
+              <a:t>The more mappers we have,</a:t>
             </a:r>
           </a:p>
           <a:p>
@@ -7780,7 +7780,7 @@
                 </a:solidFill>
                 <a:latin typeface="Arial" charset="0"/>
               </a:rPr>
-              <a:t>The more  we execute faster</a:t>
+              <a:t>the faster we execute.</a:t>
             </a:r>
           </a:p>
           <a:p>
@@ -7960,7 +7960,7 @@
               <a:rPr lang="en-US" dirty="0">
                 <a:latin typeface="Arial" charset="0"/>
               </a:rPr>
-              <a:t> – because each Executors works at its own pace, make sure Executors do not get too far ahead of the rest.</a:t>
+              <a:t> – because each Executor works at its own pace, make sure Executors do not get too far ahead of the rest.</a:t>
             </a:r>
           </a:p>
           <a:p>
@@ -8006,7 +8006,7 @@
                 </a:solidFill>
                 <a:latin typeface="Arial" charset="0"/>
               </a:rPr>
-              <a:t>, then all of these are done automagically for you!!!</a:t>
+              <a:t>, then all of these are done automagically for you!</a:t>
             </a:r>
           </a:p>
         </p:txBody>
@@ -8535,7 +8535,7 @@
                   <a:srgbClr val="002060"/>
                 </a:solidFill>
               </a:rPr>
-              <a:t>Size of each partition: 1000,000 records</a:t>
+              <a:t>Size of each partition: 1,000,000 records</a:t>
             </a:r>
           </a:p>
           <a:p>
@@ -8549,7 +8549,7 @@
                   <a:srgbClr val="00B0F0"/>
                 </a:solidFill>
               </a:rPr>
-              <a:t>200,000,000,000 = 200,000 x 1000,000</a:t>
+              <a:t>200,000,000,000 = 200,000 x 1,000,000</a:t>
             </a:r>
           </a:p>
           <a:p>
@@ -8568,7 +8568,7 @@
                   <a:srgbClr val="0070C0"/>
                 </a:solidFill>
               </a:rPr>
-              <a:t>Typically, a chunk (1000,000 records) becomes a unit of parallelism.</a:t>
+              <a:t>Typically, a chunk (1,000,000 records) becomes a unit of parallelism.</a:t>
             </a:r>
           </a:p>
           <a:p>
@@ -8703,7 +8703,7 @@
             </a:r>
             <a:r>
               <a:rPr lang="en-US" dirty="0"/>
-              <a:t>. The world around us isn't serial and sequential: many things happen at the same time</a:t>
+              <a:t>. The world around us isn't serial and sequential: many things happen at the same time.</a:t>
             </a:r>
           </a:p>
           <a:p>
@@ -8731,7 +8731,7 @@
             </a:r>
             <a:r>
               <a:rPr lang="en-US" dirty="0"/>
-              <a:t>. By saving time, parallel computing makes things cheaper and faster</a:t>
+              <a:t>. By saving time, parallel computing makes things cheaper and faster.</a:t>
             </a:r>
           </a:p>
           <a:p>
@@ -8745,7 +8745,7 @@
             </a:r>
             <a:r>
               <a:rPr lang="en-US" dirty="0"/>
-              <a:t>  be partitioning them into smaller problems</a:t>
+              <a:t> by partitioning them into smaller problems.</a:t>
             </a:r>
           </a:p>
           <a:p>
@@ -8755,7 +8755,7 @@
             </a:pPr>
             <a:r>
               <a:rPr lang="en-US" b="1" dirty="0"/>
-              <a:t>Solve Larger Problems in a short point of time.</a:t>
+              <a:t>Solve Larger Problems in a short period of time.</a:t>
             </a:r>
           </a:p>
           <a:p>
@@ -9132,7 +9132,7 @@
             <a:pPr algn="l"/>
             <a:r>
               <a:rPr lang="en-US" sz="1400" dirty="0"/>
-              <a:t>(assuming that there is no dependencies between tasks)</a:t>
+              <a:t>(assuming that there are no dependencies between tasks)</a:t>
             </a:r>
           </a:p>
           <a:p>
@@ -9315,7 +9315,7 @@
                   <a:srgbClr val="00B050"/>
                 </a:solidFill>
               </a:rPr>
-              <a:t> depends on output of </a:t>
+              <a:t> depend on the output of </a:t>
             </a:r>
             <a:r>
               <a:rPr lang="en-US" b="1" dirty="0">
@@ -9407,7 +9407,7 @@
             <a:pPr algn="l"/>
             <a:r>
               <a:rPr lang="en-US" sz="1400" dirty="0"/>
-              <a:t>(assuming that there is no dependencies between tasks)</a:t>
+              <a:t>(Task-1 and Task-2 are independent of each other, and so are Task-3 and Task-4 — but Task-3 and Task-4 depend on Task-1 and Task-2 completing first)</a:t>
             </a:r>
           </a:p>
           <a:p>
@@ -10279,7 +10279,7 @@
             </a:pPr>
             <a:r>
               <a:rPr lang="en-US" sz="2800" dirty="0"/>
-              <a:t>It is estimated that on average he needs 14 seconds to find the item and put in the shopping cart.</a:t>
+              <a:t>It is estimated that on average he needs 14 seconds to find the item and put it in the shopping cart.</a:t>
             </a:r>
           </a:p>
           <a:p>
@@ -10299,7 +10299,7 @@
                 <a:latin typeface="Consolas" panose="020B0609020204030204" pitchFamily="49" charset="0"/>
                 <a:cs typeface="Consolas" panose="020B0609020204030204" pitchFamily="49" charset="0"/>
               </a:rPr>
-              <a:t>	1000 x 14 = 14,000 seconds = 234 minutes</a:t>
+              <a:t>	1000 x 14 = 14,000 seconds = 233 minutes</a:t>
             </a:r>
           </a:p>
           <a:p>
@@ -10318,7 +10318,7 @@
             </a:r>
             <a:r>
               <a:rPr lang="en-US" sz="2800" b="1" dirty="0"/>
-              <a:t>234 minutes </a:t>
+              <a:t>233 minutes </a:t>
             </a:r>
             <a:r>
               <a:rPr lang="en-US" sz="2800" dirty="0">
@@ -10400,14 +10400,14 @@
           <a:p>
             <a:r>
               <a:rPr lang="en-US" dirty="0"/>
-              <a:t>Processing Data? One Executor: Alex</a:t>
+              <a:t>Processing Data? One Executor: Alex. </a:t>
             </a:r>
             <a:br>
               <a:rPr lang="en-US" dirty="0"/>
             </a:br>
             <a:r>
               <a:rPr lang="en-US" dirty="0"/>
-              <a:t>Buy item-1, then item-2, then item-3, …</a:t>
+              <a:t>Buy item-1, then item-2, then item-3, … </a:t>
             </a:r>
             <a:br>
               <a:rPr lang="en-US" dirty="0"/>
